--- a/courseware/DSA_CH01_Overview_ADT_Complexity.pptx
+++ b/courseware/DSA_CH01_Overview_ADT_Complexity.pptx
@@ -3343,7 +3343,7 @@
                 <a:latin typeface="Segoe UI"/>
                 <a:ea typeface="微软雅黑"/>
               </a:rPr>
-              <a:t>现代化重制版讲义　代码按 C++17 重写，全部可编译、可运行</a:t>
+              <a:t>现代化重制版讲义　代码按 C++17 重写；code/ 全部单元双档编译运行通过</a:t>
             </a:r>
           </a:p>
         </p:txBody>
@@ -26958,7 +26958,7 @@
                 <a:latin typeface="Segoe UI"/>
                 <a:ea typeface="微软雅黑"/>
               </a:rPr>
-              <a:t>习题（完整题面见同名讲义）</a:t>
+              <a:t>习题选讲</a:t>
             </a:r>
           </a:p>
         </p:txBody>
@@ -27544,6 +27544,79 @@
                 <a:ea typeface="微软雅黑"/>
               </a:rPr>
               <a:t>、重载流输出</a:t>
+            </a:r>
+          </a:p>
+          <a:p>
+            <a:pPr algn="l">
+              <a:lnSpc>
+                <a:spcPct val="132000"/>
+              </a:lnSpc>
+              <a:spcBef>
+                <a:spcPts val="0"/>
+              </a:spcBef>
+              <a:spcAft>
+                <a:spcPts val="1240"/>
+              </a:spcAft>
+            </a:pPr>
+            <a:r>
+              <a:rPr sz="2000" b="0" i="0">
+                <a:solidFill>
+                  <a:srgbClr val="242A33"/>
+                </a:solidFill>
+                <a:latin typeface="Segoe UI"/>
+                <a:ea typeface="微软雅黑"/>
+              </a:rPr>
+              <a:t>•  </a:t>
+            </a:r>
+            <a:r>
+              <a:rPr sz="2000" b="1" i="0">
+                <a:solidFill>
+                  <a:srgbClr val="12395B"/>
+                </a:solidFill>
+                <a:latin typeface="Segoe UI"/>
+                <a:ea typeface="微软雅黑"/>
+              </a:rPr>
+              <a:t>这一页和讲义里都是选讲。</a:t>
+            </a:r>
+            <a:r>
+              <a:rPr sz="2000" b="0" i="0">
+                <a:solidFill>
+                  <a:srgbClr val="242A33"/>
+                </a:solidFill>
+                <a:latin typeface="Segoe UI"/>
+                <a:ea typeface="微软雅黑"/>
+              </a:rPr>
+              <a:t> 原书全部 </a:t>
+            </a:r>
+            <a:r>
+              <a:rPr sz="2000" b="1" i="0">
+                <a:solidFill>
+                  <a:srgbClr val="12395B"/>
+                </a:solidFill>
+                <a:latin typeface="Segoe UI"/>
+                <a:ea typeface="微软雅黑"/>
+              </a:rPr>
+              <a:t>345 道</a:t>
+            </a:r>
+            <a:r>
+              <a:rPr sz="2000" b="0" i="0">
+                <a:solidFill>
+                  <a:srgbClr val="242A33"/>
+                </a:solidFill>
+                <a:latin typeface="Segoe UI"/>
+                <a:ea typeface="微软雅黑"/>
+              </a:rPr>
+              <a:t>习题与上机题的参考答案，在 </a:t>
+            </a:r>
+            <a:r>
+              <a:rPr sz="1879" b="0" i="0">
+                <a:solidFill>
+                  <a:srgbClr val="242A33"/>
+                </a:solidFill>
+                <a:latin typeface="Consolas"/>
+                <a:ea typeface="Consolas"/>
+              </a:rPr>
+              <a:t>book/习题与参考答案.md</a:t>
             </a:r>
           </a:p>
         </p:txBody>
